--- a/coursIntro.pptx
+++ b/coursIntro.pptx
@@ -367,7 +367,7 @@
             </a:pPr>
             <a:fld id="{870BBE49-FCCB-4A90-A45C-67088542EE9F}" type="datetime1">
               <a:rPr lang="fr-FR" smtClean="0"/>
-              <a:t>20/08/2026</a:t>
+              <a:t>08/09/2026</a:t>
             </a:fld>
             <a:endParaRPr lang="fr-FR"/>
           </a:p>
@@ -602,7 +602,7 @@
             </a:pPr>
             <a:fld id="{B3571AEC-2BC4-4B6C-B79E-00D12817ECD9}" type="datetime1">
               <a:rPr lang="fr-FR" smtClean="0"/>
-              <a:t>20/08/2026</a:t>
+              <a:t>08/09/2026</a:t>
             </a:fld>
             <a:endParaRPr lang="fr-FR"/>
           </a:p>
@@ -1144,7 +1144,7 @@
             </a:pPr>
             <a:fld id="{046FFCB7-D57F-4C8C-BA32-2BA73F4500C6}" type="datetime1">
               <a:rPr lang="fr-FR" smtClean="0"/>
-              <a:t>20/08/2026</a:t>
+              <a:t>08/09/2026</a:t>
             </a:fld>
             <a:endParaRPr lang="fr-FR"/>
           </a:p>
@@ -1436,7 +1436,7 @@
             </a:pPr>
             <a:fld id="{CA852A4D-1BFF-498F-B63C-A36E50EC025B}" type="datetime1">
               <a:rPr lang="fr-FR" smtClean="0"/>
-              <a:t>20/08/2026</a:t>
+              <a:t>08/09/2026</a:t>
             </a:fld>
             <a:endParaRPr lang="fr-FR"/>
           </a:p>
@@ -2929,7 +2929,7 @@
           <p:nvPr>
             <p:extLst>
               <p:ext uri="{D42A27DB-BD31-4B8C-83A1-F6EECF244321}">
-                <p14:modId xmlns:p14="http://schemas.microsoft.com/office/powerpoint/2010/main" val="346061934"/>
+                <p14:modId xmlns:p14="http://schemas.microsoft.com/office/powerpoint/2010/main" val="2238987565"/>
               </p:ext>
             </p:extLst>
           </p:nvPr>
@@ -4191,7 +4191,7 @@
                           <a:effectLst/>
                           <a:latin typeface="Liberation Sans" panose="020B0604020202020204" pitchFamily="34" charset="0"/>
                         </a:rPr>
-                        <a:t>Examen</a:t>
+                        <a:t>Evaluation</a:t>
                       </a:r>
                       <a:endParaRPr lang="fr-FR" sz="1700" dirty="0">
                         <a:effectLst/>
@@ -5251,7 +5251,7 @@
                           <a:effectLst/>
                           <a:latin typeface="Liberation Sans" panose="020B0604020202020204" pitchFamily="34" charset="0"/>
                         </a:rPr>
-                        <a:t>Projet</a:t>
+                        <a:t>Evaluation</a:t>
                       </a:r>
                     </a:p>
                   </a:txBody>

--- a/coursIntro.pptx
+++ b/coursIntro.pptx
@@ -367,7 +367,7 @@
             </a:pPr>
             <a:fld id="{870BBE49-FCCB-4A90-A45C-67088542EE9F}" type="datetime1">
               <a:rPr lang="fr-FR" smtClean="0"/>
-              <a:t>08/09/2026</a:t>
+              <a:t>13/10/2026</a:t>
             </a:fld>
             <a:endParaRPr lang="fr-FR"/>
           </a:p>
@@ -602,7 +602,7 @@
             </a:pPr>
             <a:fld id="{B3571AEC-2BC4-4B6C-B79E-00D12817ECD9}" type="datetime1">
               <a:rPr lang="fr-FR" smtClean="0"/>
-              <a:t>08/09/2026</a:t>
+              <a:t>13/10/2026</a:t>
             </a:fld>
             <a:endParaRPr lang="fr-FR"/>
           </a:p>
@@ -1144,7 +1144,7 @@
             </a:pPr>
             <a:fld id="{046FFCB7-D57F-4C8C-BA32-2BA73F4500C6}" type="datetime1">
               <a:rPr lang="fr-FR" smtClean="0"/>
-              <a:t>08/09/2026</a:t>
+              <a:t>13/10/2026</a:t>
             </a:fld>
             <a:endParaRPr lang="fr-FR"/>
           </a:p>
@@ -1436,7 +1436,7 @@
             </a:pPr>
             <a:fld id="{CA852A4D-1BFF-498F-B63C-A36E50EC025B}" type="datetime1">
               <a:rPr lang="fr-FR" smtClean="0"/>
-              <a:t>08/09/2026</a:t>
+              <a:t>13/10/2026</a:t>
             </a:fld>
             <a:endParaRPr lang="fr-FR"/>
           </a:p>
@@ -2929,7 +2929,7 @@
           <p:nvPr>
             <p:extLst>
               <p:ext uri="{D42A27DB-BD31-4B8C-83A1-F6EECF244321}">
-                <p14:modId xmlns:p14="http://schemas.microsoft.com/office/powerpoint/2010/main" val="2238987565"/>
+                <p14:modId xmlns:p14="http://schemas.microsoft.com/office/powerpoint/2010/main" val="3654335993"/>
               </p:ext>
             </p:extLst>
           </p:nvPr>
@@ -4184,7 +4184,7 @@
                         <a:defRPr/>
                       </a:pPr>
                       <a:r>
-                        <a:rPr lang="fr-FR" sz="1700" dirty="0">
+                        <a:rPr lang="fr-FR" sz="1700" strike="sngStrike" dirty="0">
                           <a:solidFill>
                             <a:srgbClr val="FF0000"/>
                           </a:solidFill>
@@ -4193,10 +4193,23 @@
                         </a:rPr>
                         <a:t>Evaluation</a:t>
                       </a:r>
-                      <a:endParaRPr lang="fr-FR" sz="1700" dirty="0">
-                        <a:effectLst/>
-                        <a:latin typeface="Liberation Sans" panose="020B0604020202020204" pitchFamily="34" charset="0"/>
-                      </a:endParaRPr>
+                      <a:r>
+                        <a:rPr lang="fr-FR" sz="1700" dirty="0">
+                          <a:solidFill>
+                            <a:srgbClr val="FF0000"/>
+                          </a:solidFill>
+                          <a:effectLst/>
+                          <a:latin typeface="Liberation Sans" panose="020B0604020202020204" pitchFamily="34" charset="0"/>
+                        </a:rPr>
+                        <a:t> </a:t>
+                      </a:r>
+                      <a:r>
+                        <a:rPr lang="fr-FR" sz="1700" dirty="0">
+                          <a:effectLst/>
+                          <a:latin typeface="Liberation Sans" panose="020B0604020202020204" pitchFamily="34" charset="0"/>
+                        </a:rPr>
+                        <a:t>API Cinéma </a:t>
+                      </a:r>
                     </a:p>
                   </a:txBody>
                   <a:tcPr marL="87038" marR="87038" marT="43519" marB="43519" anchor="ctr">
@@ -4376,16 +4389,23 @@
                         <a:defRPr/>
                       </a:pPr>
                       <a:r>
-                        <a:rPr lang="fr-FR" sz="1700" dirty="0">
+                        <a:rPr lang="fr-FR" sz="1700" strike="sngStrike" dirty="0">
                           <a:effectLst/>
                           <a:latin typeface="Liberation Sans" panose="020B0604020202020204" pitchFamily="34" charset="0"/>
                         </a:rPr>
-                        <a:t>API Cinéma</a:t>
+                        <a:t>API Cinéma </a:t>
+                      </a:r>
+                      <a:r>
+                        <a:rPr lang="fr-FR" sz="1700" dirty="0">
+                          <a:solidFill>
+                            <a:srgbClr val="FF0000"/>
+                          </a:solidFill>
+                          <a:effectLst/>
+                          <a:latin typeface="Liberation Sans" panose="020B0604020202020204" pitchFamily="34" charset="0"/>
+                        </a:rPr>
+                        <a:t>Evaluation</a:t>
                       </a:r>
                       <a:endParaRPr lang="fr-FR" sz="1700" dirty="0">
-                        <a:solidFill>
-                          <a:srgbClr val="FF0000"/>
-                        </a:solidFill>
                         <a:effectLst/>
                         <a:latin typeface="Liberation Sans" panose="020B0604020202020204" pitchFamily="34" charset="0"/>
                       </a:endParaRPr>
